--- a/presentation.pptx
+++ b/presentation.pptx
@@ -254,8 +254,11 @@
     </a:lvl9pPr>
   </p:defaultTextStyle>
   <p:extLst>
+    <p:ext uri="{EFAFB233-063F-42B5-8137-9DF3F51BA10A}">
+      <p15:sldGuideLst xmlns:p15="http://schemas.microsoft.com/office/powerpoint/2012/main"/>
+    </p:ext>
     <p:ext uri="GoogleSlidesCustomDataVersion2">
-      <go:slidesCustomData xmlns:go="http://customooxmlschemas.google.com/" xmlns:ahyp="http://schemas.microsoft.com/office/drawing/2018/hyperlinkcolor" xmlns:p15="http://schemas.microsoft.com/office/powerpoint/2012/main" xmlns:p14="http://schemas.microsoft.com/office/powerpoint/2010/main" xmlns:com="http://schemas.openxmlformats.org/drawingml/2006/compatibility" xmlns:pvml="urn:schemas-microsoft-com:office:powerpoint" xmlns:v="urn:schemas-microsoft-com:vml" xmlns:o="urn:schemas-microsoft-com:office:office" xmlns:dgm="http://schemas.openxmlformats.org/drawingml/2006/diagram" xmlns:c="http://schemas.openxmlformats.org/drawingml/2006/chart" xmlns:mv="urn:schemas-microsoft-com:mac:vml" xmlns:mc="http://schemas.openxmlformats.org/markup-compatibility/2006" xmlns="" r:id="rId16" roundtripDataSignature="AMtx7mgqVoekVJ7W7s4/UDvCNISyiS8Owg=="/>
+      <go:slidesCustomData xmlns="" xmlns:mc="http://schemas.openxmlformats.org/markup-compatibility/2006" xmlns:mv="urn:schemas-microsoft-com:mac:vml" xmlns:c="http://schemas.openxmlformats.org/drawingml/2006/chart" xmlns:dgm="http://schemas.openxmlformats.org/drawingml/2006/diagram" xmlns:o="urn:schemas-microsoft-com:office:office" xmlns:v="urn:schemas-microsoft-com:vml" xmlns:pvml="urn:schemas-microsoft-com:office:powerpoint" xmlns:com="http://schemas.openxmlformats.org/drawingml/2006/compatibility" xmlns:p14="http://schemas.microsoft.com/office/powerpoint/2010/main" xmlns:p15="http://schemas.microsoft.com/office/powerpoint/2012/main" xmlns:ahyp="http://schemas.microsoft.com/office/drawing/2018/hyperlinkcolor" xmlns:go="http://customooxmlschemas.google.com/" r:id="rId16" roundtripDataSignature="AMtx7mgqVoekVJ7W7s4/UDvCNISyiS8Owg=="/>
     </p:ext>
   </p:extLst>
 </p:presentation>
@@ -24142,55 +24145,6 @@
       </p:sp>
       <p:sp>
         <p:nvSpPr>
-          <p:cNvPr id="250" name="Google Shape;250;p5"/>
-          <p:cNvSpPr txBox="1">
-            <a:spLocks noGrp="1"/>
-          </p:cNvSpPr>
-          <p:nvPr>
-            <p:ph type="body" idx="4"/>
-          </p:nvPr>
-        </p:nvSpPr>
-        <p:spPr>
-          <a:xfrm>
-            <a:off x="9225654" y="2323370"/>
-            <a:ext cx="2595952" cy="3866293"/>
-          </a:xfrm>
-          <a:prstGeom prst="rect">
-            <a:avLst/>
-          </a:prstGeom>
-          <a:noFill/>
-          <a:ln>
-            <a:noFill/>
-          </a:ln>
-        </p:spPr>
-        <p:txBody>
-          <a:bodyPr spcFirstLastPara="1" wrap="square" lIns="91425" tIns="45700" rIns="91425" bIns="45700" anchor="t" anchorCtr="0">
-            <a:normAutofit/>
-          </a:bodyPr>
-          <a:lstStyle/>
-          <a:p>
-            <a:pPr marL="228600" lvl="0" indent="-228600" algn="l" rtl="0">
-              <a:lnSpc>
-                <a:spcPct val="90000"/>
-              </a:lnSpc>
-              <a:spcBef>
-                <a:spcPts val="0"/>
-              </a:spcBef>
-              <a:spcAft>
-                <a:spcPts val="0"/>
-              </a:spcAft>
-              <a:buClr>
-                <a:schemeClr val="lt1"/>
-              </a:buClr>
-              <a:buSzPts val="1800"/>
-              <a:buChar char="•"/>
-            </a:pPr>
-            <a:endParaRPr dirty="0"/>
-          </a:p>
-        </p:txBody>
-      </p:sp>
-      <p:sp>
-        <p:nvSpPr>
           <p:cNvPr id="251" name="Google Shape;251;p5"/>
           <p:cNvSpPr txBox="1">
             <a:spLocks noGrp="1"/>
@@ -24539,6 +24493,36 @@
           </a:p>
         </p:txBody>
       </p:sp>
+      <p:pic>
+        <p:nvPicPr>
+          <p:cNvPr id="3" name="Рисунок 2">
+            <a:extLst>
+              <a:ext uri="{FF2B5EF4-FFF2-40B4-BE49-F238E27FC236}">
+                <a16:creationId xmlns:a16="http://schemas.microsoft.com/office/drawing/2014/main" id="{EFE0D609-20BD-4EB9-93FF-332F3E9A0FA1}"/>
+              </a:ext>
+            </a:extLst>
+          </p:cNvPr>
+          <p:cNvPicPr>
+            <a:picLocks noChangeAspect="1"/>
+          </p:cNvPicPr>
+          <p:nvPr/>
+        </p:nvPicPr>
+        <p:blipFill>
+          <a:blip r:embed="rId3"/>
+          <a:stretch>
+            <a:fillRect/>
+          </a:stretch>
+        </p:blipFill>
+        <p:spPr>
+          <a:xfrm>
+            <a:off x="9217380" y="2347249"/>
+            <a:ext cx="2604227" cy="2604227"/>
+          </a:xfrm>
+          <a:prstGeom prst="rect">
+            <a:avLst/>
+          </a:prstGeom>
+        </p:spPr>
+      </p:pic>
     </p:spTree>
   </p:cSld>
   <p:clrMapOvr>
